--- a/ACE_FlowSmith_AI.pptx
+++ b/ACE_FlowSmith_AI.pptx
@@ -1696,7 +1696,7 @@
                 <a:ea typeface="Calibri" pitchFamily="34" charset="-122"/>
                 <a:cs typeface="Calibri" pitchFamily="34" charset="-120"/>
               </a:rPr>
-              <a:t>Runs in the ACE Toolkit; developer reviews &amp; fine-tunes</a:t>
+              <a:t>Runs on IBM Bob inside the ACE Toolkit; developer reviews &amp; fine-tunes</a:t>
             </a:r>
             <a:endParaRPr lang="en-US" sz="1350" dirty="0"/>
           </a:p>
@@ -2203,7 +2203,7 @@
                 <a:ea typeface="Calibri" pitchFamily="34" charset="-122"/>
                 <a:cs typeface="Calibri" pitchFamily="34" charset="-120"/>
               </a:rPr>
-              <a:t>A Java agent that runs inside the ACE Toolkit (in the approved JVM — no extra tooling needed). It learns the organisation’s reusable pattern catalog, reasons over a plain-English requirement to pick the right pattern, then instantiates it — substituting org tokens (SUBSYS / APPNM / FUNCNM) across folders, file names and contents — and produces a ready-to-import application with environment configs.</a:t>
+              <a:t>IBM Bob — IBM's AI development partner — runs inside the ACE Toolkit using our FlowSmith ACE Developer mode. It learns the organisation's reusable pattern catalog (a Bob skill), reasons over a plain-English requirement to pick the right pattern, then instantiates it — substituting org tokens (SUBSYS / APPNM / FUNCNM) across folders, file names and contents — and produces a ready-to-import application with environment configs.</a:t>
             </a:r>
             <a:endParaRPr lang="en-US" sz="1500" dirty="0"/>
           </a:p>
@@ -2678,7 +2678,7 @@
                 <a:ea typeface="Calibri" pitchFamily="34" charset="-122"/>
                 <a:cs typeface="Calibri" pitchFamily="34" charset="-120"/>
               </a:rPr>
-              <a:t>Recommends the pattern — IBM watsonx.ai (Granite), with a rule-based fallback</a:t>
+              <a:t>IBM Bob semantically matches the pattern via the flowsmith-patterns skill (Granite / watsonx.ai model underneath)</a:t>
             </a:r>
             <a:endParaRPr lang="en-US" sz="1250" dirty="0"/>
           </a:p>
@@ -3192,7 +3192,7 @@
                 <a:ea typeface="Calibri" pitchFamily="34" charset="-122"/>
                 <a:cs typeface="Calibri" pitchFamily="34" charset="-120"/>
               </a:rPr>
-              <a:t>Developer validates &amp; fine-tunes, then builds the BAR &amp; deploys</a:t>
+              <a:t>Developer validates &amp; fine-tunes; the Bob Shell then builds the BAR &amp; deploys to the local server</a:t>
             </a:r>
             <a:endParaRPr lang="en-US" sz="1250" dirty="0"/>
           </a:p>
@@ -3516,7 +3516,7 @@
                 <a:ea typeface="Calibri" pitchFamily="34" charset="-122"/>
                 <a:cs typeface="Calibri" pitchFamily="34" charset="-120"/>
               </a:rPr>
-              <a:t>watsonx.ai (Granite) interprets complex requirements and composes brand-new subflows — beyond template selection</a:t>
+              <a:t>IBM Bob, on a Granite / watsonx.ai model, interprets complex requirements and composes brand-new subflows — beyond template selection</a:t>
             </a:r>
             <a:endParaRPr lang="en-US" sz="1250" dirty="0"/>
           </a:p>

--- a/ACE_FlowSmith_AI.pptx
+++ b/ACE_FlowSmith_AI.pptx
@@ -1654,7 +1654,7 @@
                 <a:ea typeface="Calibri" pitchFamily="34" charset="-122"/>
                 <a:cs typeface="Calibri" pitchFamily="34" charset="-120"/>
               </a:rPr>
-              <a:t>Turns a plain-English requirement into standardized flows &amp; subflows</a:t>
+              <a:t>Turns a requirement + a sample input file &amp; sample output file into a standardized flow with 1:1 field mappings</a:t>
             </a:r>
             <a:endParaRPr lang="en-US" sz="1350" dirty="0"/>
           </a:p>
@@ -1675,7 +1675,7 @@
                 <a:ea typeface="Calibri" pitchFamily="34" charset="-122"/>
                 <a:cs typeface="Calibri" pitchFamily="34" charset="-120"/>
               </a:rPr>
-              <a:t>Generates runtime artifacts &amp; DEV/ACC/PRO configs</a:t>
+              <a:t>Generates the flow, ESQL mappings &amp; DEV/ACC/PRO configs, then builds &amp; deploys the BAR</a:t>
             </a:r>
             <a:endParaRPr lang="en-US" sz="1350" dirty="0"/>
           </a:p>
@@ -1696,7 +1696,7 @@
                 <a:ea typeface="Calibri" pitchFamily="34" charset="-122"/>
                 <a:cs typeface="Calibri" pitchFamily="34" charset="-120"/>
               </a:rPr>
-              <a:t>Runs on IBM Bob inside the ACE Toolkit; developer reviews &amp; fine-tunes</a:t>
+              <a:t>Runs in the ACE Toolkit: one-click Build Application, then Test Application verifies it end-to-end</a:t>
             </a:r>
             <a:endParaRPr lang="en-US" sz="1350" dirty="0"/>
           </a:p>
@@ -2203,7 +2203,7 @@
                 <a:ea typeface="Calibri" pitchFamily="34" charset="-122"/>
                 <a:cs typeface="Calibri" pitchFamily="34" charset="-120"/>
               </a:rPr>
-              <a:t>IBM Bob — IBM's AI development partner — runs inside the ACE Toolkit using our FlowSmith ACE Developer mode. It learns the organisation's reusable pattern catalog (a Bob skill), reasons over a plain-English requirement to pick the right pattern, then instantiates it — substituting org tokens (SUBSYS / APPNM / FUNCNM) across folders, file names and contents — and produces a ready-to-import application with environment configs.</a:t>
+              <a:t>IBM Bob — IBM's AI development partner — runs inside the ACE Toolkit using our FlowSmith ACE Developer mode. It learns the organisation's reusable pattern catalog (a Bob skill), infers 1:1 field mappings from a sample input file + sample output file (no mapping document), picks the pattern, then instantiates it — substituting org tokens (SUBSYS / APPNM / FUNCNM) across folders, file names and contents — rewrites the flow directories for local testing, then builds, deploys and tests the application end-to-end.</a:t>
             </a:r>
             <a:endParaRPr lang="en-US" sz="1500" dirty="0"/>
           </a:p>
@@ -2935,7 +2935,7 @@
                 <a:ea typeface="Calibri" pitchFamily="34" charset="-122"/>
                 <a:cs typeface="Calibri" pitchFamily="34" charset="-120"/>
               </a:rPr>
-              <a:t>Generates the ACE app + BAR/config artifacts for DEV/ACC/PRO</a:t>
+              <a:t>Generates the ACE app with 1:1 input-to-output ESQL mappings + BAR/config for DEV/ACC/PRO</a:t>
             </a:r>
             <a:endParaRPr lang="en-US" sz="1250" dirty="0"/>
           </a:p>
@@ -3192,7 +3192,7 @@
                 <a:ea typeface="Calibri" pitchFamily="34" charset="-122"/>
                 <a:cs typeface="Calibri" pitchFamily="34" charset="-120"/>
               </a:rPr>
-              <a:t>Developer validates &amp; fine-tunes; the Bob Shell then builds the BAR &amp; deploys to the local server</a:t>
+              <a:t>Developer reviews, then Build Application builds/deploys and Test Application verifies with a sample file</a:t>
             </a:r>
             <a:endParaRPr lang="en-US" sz="1250" dirty="0"/>
           </a:p>
